--- a/第一堂_覺察壓力_簡報.pptx
+++ b/第一堂_覺察壓力_簡報.pptx
@@ -8020,7 +8020,7 @@
         </p:nvSpPr>
         <p:spPr>
           <a:xfrm>
-            <a:off x="731520" y="5120640"/>
+            <a:off x="731520" y="4892040"/>
             <a:ext cx="1912620" cy="411480"/>
           </a:xfrm>
           <a:prstGeom prst="roundRect">
@@ -8066,7 +8066,7 @@
         </p:nvSpPr>
         <p:spPr>
           <a:xfrm>
-            <a:off x="731520" y="5120640"/>
+            <a:off x="731520" y="4892040"/>
             <a:ext cx="1912620" cy="411480"/>
           </a:xfrm>
           <a:prstGeom prst="rect">
@@ -8110,7 +8110,7 @@
         </p:nvSpPr>
         <p:spPr>
           <a:xfrm>
-            <a:off x="2781300" y="5120640"/>
+            <a:off x="2781300" y="4892040"/>
             <a:ext cx="2979420" cy="411480"/>
           </a:xfrm>
           <a:prstGeom prst="roundRect">
@@ -8156,7 +8156,7 @@
         </p:nvSpPr>
         <p:spPr>
           <a:xfrm>
-            <a:off x="2781300" y="5120640"/>
+            <a:off x="2781300" y="4892040"/>
             <a:ext cx="2979420" cy="411480"/>
           </a:xfrm>
           <a:prstGeom prst="rect">
@@ -8200,7 +8200,7 @@
         </p:nvSpPr>
         <p:spPr>
           <a:xfrm>
-            <a:off x="5897880" y="5120640"/>
+            <a:off x="5897880" y="4892040"/>
             <a:ext cx="1150620" cy="411480"/>
           </a:xfrm>
           <a:prstGeom prst="roundRect">
@@ -8246,7 +8246,7 @@
         </p:nvSpPr>
         <p:spPr>
           <a:xfrm>
-            <a:off x="5897880" y="5120640"/>
+            <a:off x="5897880" y="4892040"/>
             <a:ext cx="1150620" cy="411480"/>
           </a:xfrm>
           <a:prstGeom prst="rect">
@@ -8282,9 +8282,55 @@
           </a:p>
         </p:txBody>
       </p:sp>
+      <p:sp>
+        <p:nvSpPr>
+          <p:cNvPr id="13" name="Rounded Rectangle 12"/>
+          <p:cNvSpPr/>
+          <p:nvPr/>
+        </p:nvSpPr>
+        <p:spPr>
+          <a:xfrm>
+            <a:off x="731520" y="5486400"/>
+            <a:ext cx="4206240" cy="1143000"/>
+          </a:xfrm>
+          <a:prstGeom prst="roundRect">
+            <a:avLst>
+              <a:gd name="adj" fmla="val 4800"/>
+            </a:avLst>
+          </a:prstGeom>
+          <a:solidFill>
+            <a:srgbClr val="FFFFFF"/>
+          </a:solidFill>
+          <a:ln w="12700">
+            <a:solidFill>
+              <a:srgbClr val="DDD4EA"/>
+            </a:solidFill>
+          </a:ln>
+          <a:effectLst/>
+        </p:spPr>
+        <p:style>
+          <a:lnRef idx="1">
+            <a:schemeClr val="accent1"/>
+          </a:lnRef>
+          <a:fillRef idx="3">
+            <a:schemeClr val="accent1"/>
+          </a:fillRef>
+          <a:effectRef idx="2">
+            <a:schemeClr val="accent1"/>
+          </a:effectRef>
+          <a:fontRef idx="minor">
+            <a:schemeClr val="lt1"/>
+          </a:fontRef>
+        </p:style>
+        <p:txBody>
+          <a:bodyPr rtlCol="0" anchor="ctr"/>
+          <a:lstStyle/>
+          <a:p/>
+        </p:txBody>
+      </p:sp>
       <p:pic>
         <p:nvPicPr>
-          <p:cNvPr id="13" name="Picture 12" descr="cover_happy.jpg"/>
+          <p:cNvPr id="14" name="Picture 13" descr="qr.png"/>
           <p:cNvPicPr>
             <a:picLocks noChangeAspect="1"/>
           </p:cNvPicPr>
@@ -8292,6 +8338,95 @@
         </p:nvPicPr>
         <p:blipFill>
           <a:blip r:embed="rId2"/>
+          <a:stretch>
+            <a:fillRect/>
+          </a:stretch>
+        </p:blipFill>
+        <p:spPr>
+          <a:xfrm>
+            <a:off x="822960" y="5559552"/>
+            <a:ext cx="1005840" cy="1005840"/>
+          </a:xfrm>
+          <a:prstGeom prst="rect">
+            <a:avLst/>
+          </a:prstGeom>
+        </p:spPr>
+      </p:pic>
+      <p:sp>
+        <p:nvSpPr>
+          <p:cNvPr id="15" name="TextBox 14"/>
+          <p:cNvSpPr txBox="1"/>
+          <p:nvPr/>
+        </p:nvSpPr>
+        <p:spPr>
+          <a:xfrm>
+            <a:off x="1920240" y="5577840"/>
+            <a:ext cx="2926080" cy="960120"/>
+          </a:xfrm>
+          <a:prstGeom prst="rect">
+            <a:avLst/>
+          </a:prstGeom>
+          <a:noFill/>
+        </p:spPr>
+        <p:txBody>
+          <a:bodyPr wrap="square" lIns="45720" rIns="45720" tIns="27432" bIns="27432" anchor="ctr">
+            <a:spAutoFit/>
+          </a:bodyPr>
+          <a:lstStyle/>
+          <a:p>
+            <a:pPr algn="l">
+              <a:lnSpc>
+                <a:spcPct val="115000"/>
+              </a:lnSpc>
+              <a:spcAft>
+                <a:spcPts val="260"/>
+              </a:spcAft>
+            </a:pPr>
+            <a:r>
+              <a:rPr sz="1300" b="1">
+                <a:solidFill>
+                  <a:srgbClr val="2B1B3D"/>
+                </a:solidFill>
+                <a:latin typeface="Microsoft JhengHei"/>
+                <a:ea typeface="Microsoft JhengHei"/>
+                <a:cs typeface="Microsoft JhengHei"/>
+              </a:rPr>
+              <a:t>掃描帶走簡報</a:t>
+            </a:r>
+          </a:p>
+          <a:p>
+            <a:pPr algn="l">
+              <a:lnSpc>
+                <a:spcPct val="115000"/>
+              </a:lnSpc>
+              <a:spcAft>
+                <a:spcPts val="260"/>
+              </a:spcAft>
+            </a:pPr>
+            <a:r>
+              <a:rPr sz="1300" b="0">
+                <a:solidFill>
+                  <a:srgbClr val="2B1B3D"/>
+                </a:solidFill>
+                <a:latin typeface="Microsoft JhengHei"/>
+                <a:ea typeface="Microsoft JhengHei"/>
+                <a:cs typeface="Microsoft JhengHei"/>
+              </a:rPr>
+              <a:t>mattsue1003.github.io/usr-stress-lesson1</a:t>
+            </a:r>
+          </a:p>
+        </p:txBody>
+      </p:sp>
+      <p:pic>
+        <p:nvPicPr>
+          <p:cNvPr id="16" name="Picture 15" descr="cover_happy.jpg"/>
+          <p:cNvPicPr>
+            <a:picLocks noChangeAspect="1"/>
+          </p:cNvPicPr>
+          <p:nvPr/>
+        </p:nvPicPr>
+        <p:blipFill>
+          <a:blip r:embed="rId3"/>
           <a:srcRect l="22966" r="22966"/>
           <a:stretch>
             <a:fillRect/>
@@ -50609,7 +50744,7 @@
         <p:spPr>
           <a:xfrm>
             <a:off x="457200" y="1417320"/>
-            <a:ext cx="2682163" cy="3853180"/>
+            <a:ext cx="2682163" cy="3690620"/>
           </a:xfrm>
           <a:prstGeom prst="roundRect">
             <a:avLst>
@@ -50654,8 +50789,8 @@
         </p:nvSpPr>
         <p:spPr>
           <a:xfrm>
-            <a:off x="457200" y="1879701"/>
-            <a:ext cx="2682163" cy="1310081"/>
+            <a:off x="457200" y="1860194"/>
+            <a:ext cx="2682163" cy="1254810"/>
           </a:xfrm>
           <a:prstGeom prst="rect">
             <a:avLst/>
@@ -50673,11 +50808,11 @@
                 <a:spcPct val="115000"/>
               </a:lnSpc>
               <a:spcAft>
-                <a:spcPts val="1295"/>
-              </a:spcAft>
-            </a:pPr>
-            <a:r>
-              <a:rPr sz="3700" b="1">
+                <a:spcPts val="1260"/>
+              </a:spcAft>
+            </a:pPr>
+            <a:r>
+              <a:rPr sz="3600" b="1">
                 <a:solidFill>
                   <a:srgbClr val="7B4FB3"/>
                 </a:solidFill>
@@ -50698,7 +50833,7 @@
         </p:nvSpPr>
         <p:spPr>
           <a:xfrm>
-            <a:off x="457200" y="3228314"/>
+            <a:off x="457200" y="3151911"/>
             <a:ext cx="2682163" cy="320040"/>
           </a:xfrm>
           <a:prstGeom prst="rect">
@@ -50742,8 +50877,8 @@
         </p:nvSpPr>
         <p:spPr>
           <a:xfrm>
-            <a:off x="594360" y="3806291"/>
-            <a:ext cx="2407843" cy="1387144"/>
+            <a:off x="594360" y="3705504"/>
+            <a:ext cx="2407843" cy="1328623"/>
           </a:xfrm>
           <a:prstGeom prst="rect">
             <a:avLst/>
@@ -50787,7 +50922,7 @@
         <p:spPr>
           <a:xfrm>
             <a:off x="3322243" y="1417320"/>
-            <a:ext cx="2682163" cy="3853180"/>
+            <a:ext cx="2682163" cy="3690620"/>
           </a:xfrm>
           <a:prstGeom prst="roundRect">
             <a:avLst>
@@ -50832,8 +50967,8 @@
         </p:nvSpPr>
         <p:spPr>
           <a:xfrm>
-            <a:off x="3322243" y="1879701"/>
-            <a:ext cx="2682163" cy="1310081"/>
+            <a:off x="3322243" y="1860194"/>
+            <a:ext cx="2682163" cy="1254810"/>
           </a:xfrm>
           <a:prstGeom prst="rect">
             <a:avLst/>
@@ -50851,11 +50986,11 @@
                 <a:spcPct val="115000"/>
               </a:lnSpc>
               <a:spcAft>
-                <a:spcPts val="1295"/>
-              </a:spcAft>
-            </a:pPr>
-            <a:r>
-              <a:rPr sz="3700" b="1">
+                <a:spcPts val="1260"/>
+              </a:spcAft>
+            </a:pPr>
+            <a:r>
+              <a:rPr sz="3600" b="1">
                 <a:solidFill>
                   <a:srgbClr val="7B4FB3"/>
                 </a:solidFill>
@@ -50876,7 +51011,7 @@
         </p:nvSpPr>
         <p:spPr>
           <a:xfrm>
-            <a:off x="3322243" y="3228314"/>
+            <a:off x="3322243" y="3151911"/>
             <a:ext cx="2682163" cy="320040"/>
           </a:xfrm>
           <a:prstGeom prst="rect">
@@ -50920,8 +51055,8 @@
         </p:nvSpPr>
         <p:spPr>
           <a:xfrm>
-            <a:off x="3459403" y="3806291"/>
-            <a:ext cx="2407843" cy="1387144"/>
+            <a:off x="3459403" y="3705504"/>
+            <a:ext cx="2407843" cy="1328623"/>
           </a:xfrm>
           <a:prstGeom prst="rect">
             <a:avLst/>
@@ -50965,7 +51100,7 @@
         <p:spPr>
           <a:xfrm>
             <a:off x="6187287" y="1417320"/>
-            <a:ext cx="2682163" cy="3853180"/>
+            <a:ext cx="2682163" cy="3690620"/>
           </a:xfrm>
           <a:prstGeom prst="roundRect">
             <a:avLst>
@@ -51010,8 +51145,8 @@
         </p:nvSpPr>
         <p:spPr>
           <a:xfrm>
-            <a:off x="6187287" y="1879701"/>
-            <a:ext cx="2682163" cy="1310081"/>
+            <a:off x="6187287" y="1860194"/>
+            <a:ext cx="2682163" cy="1254810"/>
           </a:xfrm>
           <a:prstGeom prst="rect">
             <a:avLst/>
@@ -51029,11 +51164,11 @@
                 <a:spcPct val="115000"/>
               </a:lnSpc>
               <a:spcAft>
-                <a:spcPts val="1295"/>
-              </a:spcAft>
-            </a:pPr>
-            <a:r>
-              <a:rPr sz="3700" b="1">
+                <a:spcPts val="1260"/>
+              </a:spcAft>
+            </a:pPr>
+            <a:r>
+              <a:rPr sz="3600" b="1">
                 <a:solidFill>
                   <a:srgbClr val="7B4FB3"/>
                 </a:solidFill>
@@ -51054,7 +51189,7 @@
         </p:nvSpPr>
         <p:spPr>
           <a:xfrm>
-            <a:off x="6187287" y="3228314"/>
+            <a:off x="6187287" y="3151911"/>
             <a:ext cx="2682163" cy="320040"/>
           </a:xfrm>
           <a:prstGeom prst="rect">
@@ -51098,8 +51233,8 @@
         </p:nvSpPr>
         <p:spPr>
           <a:xfrm>
-            <a:off x="6324447" y="3806291"/>
-            <a:ext cx="2407843" cy="1387144"/>
+            <a:off x="6324447" y="3705504"/>
+            <a:ext cx="2407843" cy="1328623"/>
           </a:xfrm>
           <a:prstGeom prst="rect">
             <a:avLst/>
@@ -51143,7 +51278,7 @@
         <p:spPr>
           <a:xfrm>
             <a:off x="9052331" y="1417320"/>
-            <a:ext cx="2682163" cy="3853180"/>
+            <a:ext cx="2682163" cy="3690620"/>
           </a:xfrm>
           <a:prstGeom prst="roundRect">
             <a:avLst>
@@ -51188,8 +51323,8 @@
         </p:nvSpPr>
         <p:spPr>
           <a:xfrm>
-            <a:off x="9052331" y="1879701"/>
-            <a:ext cx="2682163" cy="1310081"/>
+            <a:off x="9052331" y="1860194"/>
+            <a:ext cx="2682163" cy="1254810"/>
           </a:xfrm>
           <a:prstGeom prst="rect">
             <a:avLst/>
@@ -51207,11 +51342,11 @@
                 <a:spcPct val="115000"/>
               </a:lnSpc>
               <a:spcAft>
-                <a:spcPts val="1295"/>
-              </a:spcAft>
-            </a:pPr>
-            <a:r>
-              <a:rPr sz="3700" b="1">
+                <a:spcPts val="1260"/>
+              </a:spcAft>
+            </a:pPr>
+            <a:r>
+              <a:rPr sz="3600" b="1">
                 <a:solidFill>
                   <a:srgbClr val="7B4FB3"/>
                 </a:solidFill>
@@ -51232,7 +51367,7 @@
         </p:nvSpPr>
         <p:spPr>
           <a:xfrm>
-            <a:off x="9052331" y="3228314"/>
+            <a:off x="9052331" y="3151911"/>
             <a:ext cx="2682163" cy="320040"/>
           </a:xfrm>
           <a:prstGeom prst="rect">
@@ -51276,8 +51411,8 @@
         </p:nvSpPr>
         <p:spPr>
           <a:xfrm>
-            <a:off x="9189491" y="3806291"/>
-            <a:ext cx="2407843" cy="1387144"/>
+            <a:off x="9189491" y="3705504"/>
+            <a:ext cx="2407843" cy="1328623"/>
           </a:xfrm>
           <a:prstGeom prst="rect">
             <a:avLst/>
@@ -51320,12 +51455,12 @@
         </p:nvSpPr>
         <p:spPr>
           <a:xfrm>
-            <a:off x="457200" y="5453380"/>
-            <a:ext cx="11277295" cy="855980"/>
+            <a:off x="457200" y="5290820"/>
+            <a:ext cx="11277295" cy="1018540"/>
           </a:xfrm>
           <a:prstGeom prst="roundRect">
             <a:avLst>
-              <a:gd name="adj" fmla="val 6409"/>
+              <a:gd name="adj" fmla="val 5386"/>
             </a:avLst>
           </a:prstGeom>
           <a:solidFill>
@@ -51364,8 +51499,8 @@
         </p:nvSpPr>
         <p:spPr>
           <a:xfrm>
-            <a:off x="594360" y="5453380"/>
-            <a:ext cx="11002975" cy="855980"/>
+            <a:off x="594360" y="5290820"/>
+            <a:ext cx="11002975" cy="1018540"/>
           </a:xfrm>
           <a:prstGeom prst="rect">
             <a:avLst/>
@@ -51409,6 +51544,38 @@
               <a:t>做幾次比做多久重要。慢、配吐氣、中等力道。最好的方法是你明天真的會做的那一個。</a:t>
             </a:r>
           </a:p>
+          <a:p>
+            <a:pPr algn="l">
+              <a:lnSpc>
+                <a:spcPct val="115000"/>
+              </a:lnSpc>
+              <a:spcAft>
+                <a:spcPts val="525"/>
+              </a:spcAft>
+            </a:pPr>
+            <a:r>
+              <a:rPr sz="1500" b="1">
+                <a:solidFill>
+                  <a:srgbClr val="7B4FB3"/>
+                </a:solidFill>
+                <a:latin typeface="Microsoft JhengHei"/>
+                <a:ea typeface="Microsoft JhengHei"/>
+                <a:cs typeface="Microsoft JhengHei"/>
+              </a:rPr>
+              <a:t>掃描帶走簡報：</a:t>
+            </a:r>
+            <a:r>
+              <a:rPr sz="1500" b="0">
+                <a:solidFill>
+                  <a:srgbClr val="2B1B3D"/>
+                </a:solidFill>
+                <a:latin typeface="Microsoft JhengHei"/>
+                <a:ea typeface="Microsoft JhengHei"/>
+                <a:cs typeface="Microsoft JhengHei"/>
+              </a:rPr>
+              <a:t>mattsue1003.github.io/usr-stress-lesson1</a:t>
+            </a:r>
+          </a:p>
         </p:txBody>
       </p:sp>
       <p:sp>
@@ -51451,6 +51618,95 @@
                 <a:cs typeface="Microsoft JhengHei"/>
               </a:rPr>
               <a:t>來源：下一堂：身心修復｜練習身心運動，找回天然的自癒力。聯絡人：許晊豪老師。</a:t>
+            </a:r>
+          </a:p>
+        </p:txBody>
+      </p:sp>
+      <p:pic>
+        <p:nvPicPr>
+          <p:cNvPr id="24" name="Picture 23" descr="qr.png"/>
+          <p:cNvPicPr>
+            <a:picLocks noChangeAspect="1"/>
+          </p:cNvPicPr>
+          <p:nvPr/>
+        </p:nvPicPr>
+        <p:blipFill>
+          <a:blip r:embed="rId2"/>
+          <a:stretch>
+            <a:fillRect/>
+          </a:stretch>
+        </p:blipFill>
+        <p:spPr>
+          <a:xfrm>
+            <a:off x="10607040" y="228600"/>
+            <a:ext cx="1051560" cy="1051560"/>
+          </a:xfrm>
+          <a:prstGeom prst="rect">
+            <a:avLst/>
+          </a:prstGeom>
+        </p:spPr>
+      </p:pic>
+      <p:sp>
+        <p:nvSpPr>
+          <p:cNvPr id="25" name="TextBox 24"/>
+          <p:cNvSpPr txBox="1"/>
+          <p:nvPr/>
+        </p:nvSpPr>
+        <p:spPr>
+          <a:xfrm>
+            <a:off x="8778240" y="411480"/>
+            <a:ext cx="1783080" cy="731520"/>
+          </a:xfrm>
+          <a:prstGeom prst="rect">
+            <a:avLst/>
+          </a:prstGeom>
+          <a:noFill/>
+        </p:spPr>
+        <p:txBody>
+          <a:bodyPr wrap="square" lIns="45720" rIns="45720" tIns="27432" bIns="27432" anchor="ctr">
+            <a:spAutoFit/>
+          </a:bodyPr>
+          <a:lstStyle/>
+          <a:p>
+            <a:pPr algn="r">
+              <a:lnSpc>
+                <a:spcPct val="115000"/>
+              </a:lnSpc>
+              <a:spcAft>
+                <a:spcPts val="150"/>
+              </a:spcAft>
+            </a:pPr>
+            <a:r>
+              <a:rPr sz="1000" b="1">
+                <a:solidFill>
+                  <a:srgbClr val="2B1B3D"/>
+                </a:solidFill>
+                <a:latin typeface="Microsoft JhengHei"/>
+                <a:ea typeface="Microsoft JhengHei"/>
+                <a:cs typeface="Microsoft JhengHei"/>
+              </a:rPr>
+              <a:t>掃描帶走簡報</a:t>
+            </a:r>
+          </a:p>
+          <a:p>
+            <a:pPr algn="r">
+              <a:lnSpc>
+                <a:spcPct val="115000"/>
+              </a:lnSpc>
+              <a:spcAft>
+                <a:spcPts val="150"/>
+              </a:spcAft>
+            </a:pPr>
+            <a:r>
+              <a:rPr sz="1000" b="0">
+                <a:solidFill>
+                  <a:srgbClr val="2B1B3D"/>
+                </a:solidFill>
+                <a:latin typeface="Microsoft JhengHei"/>
+                <a:ea typeface="Microsoft JhengHei"/>
+                <a:cs typeface="Microsoft JhengHei"/>
+              </a:rPr>
+              <a:t>mattsue1003.github.io/usr-stress-lesson1</a:t>
             </a:r>
           </a:p>
         </p:txBody>
